--- a/assets/pptx/catalog-160.pptx
+++ b/assets/pptx/catalog-160.pptx
@@ -3253,7 +3253,7 @@
                 <a:ea typeface="Ebrima"/>
                 <a:cs typeface="Ebrima"/>
               </a:rPr>
-              <a:t>አይባልም (4x)</a:t>
+              <a:t>አይባልም 4x</a:t>
             </a:r>
           </a:p>
         </p:txBody>
@@ -3477,7 +3477,7 @@
                 <a:ea typeface="Ebrima"/>
                 <a:cs typeface="Ebrima"/>
               </a:rPr>
-              <a:t>አገዛዝን ያስተማረው ማነው (2x)</a:t>
+              <a:t>አገዛዝን ያስተማረው ማነው 2x</a:t>
             </a:r>
           </a:p>
         </p:txBody>
@@ -3562,7 +3562,7 @@
                 <a:ea typeface="Ebrima"/>
                 <a:cs typeface="Ebrima"/>
               </a:rPr>
-              <a:t>የለበትም አስተዳዳሪ የበላይ (2x)</a:t>
+              <a:t>የለበትም አስተዳዳሪ የበላይ 2x</a:t>
             </a:r>
           </a:p>
         </p:txBody>
@@ -3714,7 +3714,7 @@
                 <a:ea typeface="Ebrima"/>
                 <a:cs typeface="Ebrima"/>
               </a:rPr>
-              <a:t>ጌታ አሰራሩ ልዩ ልዩ ነው (2x)</a:t>
+              <a:t>ጌታ አሰራሩ ልዩ ልዩ ነው 2x</a:t>
             </a:r>
           </a:p>
           <a:p>
@@ -3732,7 +3732,7 @@
                 <a:ea typeface="Ebrima"/>
                 <a:cs typeface="Ebrima"/>
               </a:rPr>
-              <a:t>ምን ትሰራለህስ ማነው የሚለው (2x)</a:t>
+              <a:t>ምን ትሰራለህስ ማነው የሚለው 2x</a:t>
             </a:r>
           </a:p>
           <a:p>
@@ -3750,7 +3750,7 @@
                 <a:ea typeface="Ebrima"/>
                 <a:cs typeface="Ebrima"/>
               </a:rPr>
-              <a:t>ጌታ አሰራሩ ልዩ ልዩ ነው (2x)</a:t>
+              <a:t>ጌታ አሰራሩ ልዩ ልዩ ነው 2x</a:t>
             </a:r>
           </a:p>
           <a:p>
@@ -3768,7 +3768,7 @@
                 <a:ea typeface="Ebrima"/>
                 <a:cs typeface="Ebrima"/>
               </a:rPr>
-              <a:t>ምን ታደርጋለህስ ማነው የሚለው (2x)</a:t>
+              <a:t>ምን ታደርጋለህስ ማነው የሚለው 2x</a:t>
             </a:r>
           </a:p>
         </p:txBody>
@@ -4440,7 +4440,7 @@
                 <a:ea typeface="Ebrima"/>
                 <a:cs typeface="Ebrima"/>
               </a:rPr>
-              <a:t>አስተማሪ የሌለው መሪ የእኔ ጌታ (2x)</a:t>
+              <a:t>አስተማሪ የሌለው መሪ የእኔ ጌታ 2x</a:t>
             </a:r>
           </a:p>
         </p:txBody>
@@ -4525,7 +4525,7 @@
                 <a:ea typeface="Ebrima"/>
                 <a:cs typeface="Ebrima"/>
               </a:rPr>
-              <a:t>እኔ አሳይሃለሁ በዚህ መንገድ ሂድልኝ አይባልም (2x)</a:t>
+              <a:t>እኔ አሳይሃለሁ በዚህ መንገድ ሂድልኝ አይባልም 2x</a:t>
             </a:r>
           </a:p>
         </p:txBody>
